--- a/reports/Franklin_Guillano_DIAL_ALERT_Technical_Presentation.pptx
+++ b/reports/Franklin_Guillano_DIAL_ALERT_Technical_Presentation.pptx
@@ -19,6 +19,10 @@
     <p:sldId xmlns:r="http://schemas.openxmlformats.org/officeDocument/2006/relationships" id="264" r:id="R7a5373735f394c60"/>
     <p:sldId xmlns:r="http://schemas.openxmlformats.org/officeDocument/2006/relationships" id="265" r:id="Rc4801cb9dfff4813"/>
     <p:sldId xmlns:r="http://schemas.openxmlformats.org/officeDocument/2006/relationships" id="266" r:id="R17cb69dfa1fd4705"/>
+    <p:sldId xmlns:ns0="http://schemas.openxmlformats.org/officeDocument/2006/relationships" id="268" ns0:id="rId18"/>
+    <p:sldId xmlns:ns0="http://schemas.openxmlformats.org/officeDocument/2006/relationships" id="269" ns0:id="rId19"/>
+    <p:sldId xmlns:ns0="http://schemas.openxmlformats.org/officeDocument/2006/relationships" id="270" ns0:id="rId20"/>
+    <p:sldId xmlns:ns0="http://schemas.openxmlformats.org/officeDocument/2006/relationships" id="271" ns0:id="rId21"/>
     <p:sldId xmlns:r="http://schemas.openxmlformats.org/officeDocument/2006/relationships" id="267" r:id="Rd490bd4698374ced"/>
   </p:sldIdLst>
   <p:sldSz cx="12192000" cy="6858000"/>
@@ -3080,6 +3084,10 @@
             <a:prstDash val="solid"/>
           </a:ln>
         </p:spPr>
+        <p:txBody xmlns:a="http://schemas.openxmlformats.org/drawingml/2006/main">
+          <a:bodyPr/>
+          <a:p/>
+        </p:txBody>
       </p:sp>
       <p:sp>
         <p:nvSpPr>
@@ -3308,6 +3316,10 @@
             <a:prstDash val="solid"/>
           </a:ln>
         </p:spPr>
+        <p:txBody xmlns:a="http://schemas.openxmlformats.org/drawingml/2006/main">
+          <a:bodyPr/>
+          <a:p/>
+        </p:txBody>
       </p:sp>
       <p:sp>
         <p:nvSpPr>
@@ -3501,6 +3513,10 @@
             <a:prstDash val="solid"/>
           </a:ln>
         </p:spPr>
+        <p:txBody xmlns:a="http://schemas.openxmlformats.org/drawingml/2006/main">
+          <a:bodyPr/>
+          <a:p/>
+        </p:txBody>
       </p:sp>
       <p:sp>
         <p:nvSpPr>
@@ -3619,6 +3635,10 @@
             <a:prstDash val="solid"/>
           </a:ln>
         </p:spPr>
+        <p:txBody xmlns:a="http://schemas.openxmlformats.org/drawingml/2006/main">
+          <a:bodyPr/>
+          <a:p/>
+        </p:txBody>
       </p:sp>
       <p:sp>
         <p:nvSpPr>
@@ -3673,7 +3693,7 @@
                 <a:ea typeface="Nimbus Sans"/>
                 <a:cs typeface="Nimbus Sans"/>
               </a:rPr>
-              <a:t>Reweighting improves recorded-sex gaps but does not resolve fairness</a:t>
+              <a:t>Fairness mitigation findings remain exploratory</a:t>
             </a:r>
           </a:p>
         </p:txBody>
@@ -3811,7 +3831,7 @@
                 <a:ea typeface="Nimbus Sans"/>
                 <a:cs typeface="Nimbus Sans"/>
               </a:rPr>
-              <a:t>Reweighting retained</a:t>
+              <a:t>Reweighting explored</a:t>
             </a:r>
           </a:p>
         </p:txBody>
@@ -4194,6 +4214,10 @@
             <a:prstDash val="solid"/>
           </a:ln>
         </p:spPr>
+        <p:txBody xmlns:a="http://schemas.openxmlformats.org/drawingml/2006/main">
+          <a:bodyPr/>
+          <a:p/>
+        </p:txBody>
       </p:sp>
       <p:sp>
         <p:nvSpPr>
@@ -4312,6 +4336,10 @@
             <a:prstDash val="solid"/>
           </a:ln>
         </p:spPr>
+        <p:txBody xmlns:a="http://schemas.openxmlformats.org/drawingml/2006/main">
+          <a:bodyPr/>
+          <a:p/>
+        </p:txBody>
       </p:sp>
       <p:sp>
         <p:nvSpPr>
@@ -4366,7 +4394,7 @@
                 <a:ea typeface="Nimbus Sans"/>
                 <a:cs typeface="Nimbus Sans"/>
               </a:rPr>
-              <a:t>The analysis is reproducible from source data to locked model</a:t>
+              <a:t>Reproduction instructions are provided; full rerun is blocked</a:t>
             </a:r>
           </a:p>
         </p:txBody>
@@ -4424,7 +4452,7 @@
                 <a:ea typeface="Nimbus Sans"/>
                 <a:cs typeface="Nimbus Sans"/>
               </a:rPr>
-              <a:t>Configurations, partitions, trained pipelines, metrics, and integrity hashes are saved</a:t>
+              <a:t>Clean environment installed; source acquisition returned HTTP 403</a:t>
             </a:r>
           </a:p>
         </p:txBody>
@@ -4598,7 +4626,7 @@
                 <a:ea typeface="Nimbus Sans"/>
                 <a:cs typeface="Nimbus Sans"/>
               </a:rPr>
-              <a:t>Public HEMOBP source files</a:t>
+              <a:t>Download HEMOBP source files; not bundled</a:t>
             </a:r>
           </a:p>
         </p:txBody>
@@ -4633,6 +4661,10 @@
             <a:prstDash val="solid"/>
           </a:ln>
         </p:spPr>
+        <p:txBody xmlns:a="http://schemas.openxmlformats.org/drawingml/2006/main">
+          <a:bodyPr/>
+          <a:p/>
+        </p:txBody>
       </p:sp>
       <p:sp>
         <p:nvSpPr>
@@ -4745,7 +4777,7 @@
                 <a:ea typeface="Nimbus Sans"/>
                 <a:cs typeface="Nimbus Sans"/>
               </a:rPr>
-              <a:t>Leakage-controlled session table</a:t>
+              <a:t>Regenerate the session table; not bundled</a:t>
             </a:r>
           </a:p>
         </p:txBody>
@@ -4780,6 +4812,10 @@
             <a:prstDash val="solid"/>
           </a:ln>
         </p:spPr>
+        <p:txBody xmlns:a="http://schemas.openxmlformats.org/drawingml/2006/main">
+          <a:bodyPr/>
+          <a:p/>
+        </p:txBody>
       </p:sp>
       <p:sp>
         <p:nvSpPr>
@@ -4927,6 +4963,10 @@
             <a:prstDash val="solid"/>
           </a:ln>
         </p:spPr>
+        <p:txBody xmlns:a="http://schemas.openxmlformats.org/drawingml/2006/main">
+          <a:bodyPr/>
+          <a:p/>
+        </p:txBody>
       </p:sp>
       <p:sp>
         <p:nvSpPr>
@@ -5074,6 +5114,10 @@
             <a:prstDash val="solid"/>
           </a:ln>
         </p:spPr>
+        <p:txBody xmlns:a="http://schemas.openxmlformats.org/drawingml/2006/main">
+          <a:bodyPr/>
+          <a:p/>
+        </p:txBody>
       </p:sp>
       <p:sp>
         <p:nvSpPr>
@@ -5186,7 +5230,7 @@
                 <a:ea typeface="Nimbus Sans"/>
                 <a:cs typeface="Nimbus Sans"/>
               </a:rPr>
-              <a:t>Candidate and selected pipelines with manifest</a:t>
+              <a:t>Selected predictor included; candidates regenerated</a:t>
             </a:r>
           </a:p>
         </p:txBody>
@@ -5221,6 +5265,10 @@
             <a:prstDash val="solid"/>
           </a:ln>
         </p:spPr>
+        <p:txBody xmlns:a="http://schemas.openxmlformats.org/drawingml/2006/main">
+          <a:bodyPr/>
+          <a:p/>
+        </p:txBody>
       </p:sp>
       <p:sp>
         <p:nvSpPr>
@@ -5333,7 +5381,7 @@
                 <a:ea typeface="Nimbus Sans"/>
                 <a:cs typeface="Nimbus Sans"/>
               </a:rPr>
-              <a:t>Metrics, plots, assignments, audit outputs</a:t>
+              <a:t>Aggregate metrics and plots; assignments regenerated</a:t>
             </a:r>
           </a:p>
         </p:txBody>
@@ -5368,6 +5416,10 @@
             <a:prstDash val="solid"/>
           </a:ln>
         </p:spPr>
+        <p:txBody xmlns:a="http://schemas.openxmlformats.org/drawingml/2006/main">
+          <a:bodyPr/>
+          <a:p/>
+        </p:txBody>
       </p:sp>
       <p:sp>
         <p:nvSpPr>
@@ -5515,6 +5567,10 @@
             <a:prstDash val="solid"/>
           </a:ln>
         </p:spPr>
+        <p:txBody xmlns:a="http://schemas.openxmlformats.org/drawingml/2006/main">
+          <a:bodyPr/>
+          <a:p/>
+        </p:txBody>
       </p:sp>
       <p:sp>
         <p:nvSpPr>
@@ -5546,6 +5602,10 @@
             <a:prstDash val="solid"/>
           </a:ln>
         </p:spPr>
+        <p:txBody xmlns:a="http://schemas.openxmlformats.org/drawingml/2006/main">
+          <a:bodyPr/>
+          <a:p/>
+        </p:txBody>
       </p:sp>
       <p:sp>
         <p:nvSpPr>
@@ -6130,7 +6190,7 @@
                 <a:ea typeface="Nimbus Sans"/>
                 <a:cs typeface="Nimbus Sans"/>
               </a:rPr>
-              <a:t>Model manifest records package versions, file hashes, random seeds, feature order, and threshold metadata.</a:t>
+              <a:t>Execution record: included-model checks passed; full data-to-training run is blocked.</a:t>
             </a:r>
           </a:p>
         </p:txBody>
@@ -6223,6 +6283,10 @@
             <a:prstDash val="solid"/>
           </a:ln>
         </p:spPr>
+        <p:txBody xmlns:a="http://schemas.openxmlformats.org/drawingml/2006/main">
+          <a:bodyPr/>
+          <a:p/>
+        </p:txBody>
       </p:sp>
       <p:sp>
         <p:nvSpPr>
@@ -6293,6 +6357,1334 @@
 </file>
 
 <file path=ppt/slides/slide12.xml><?xml version="1.0" encoding="utf-8"?>
+<p:sld xmlns:a="http://schemas.openxmlformats.org/drawingml/2006/main" xmlns:p="http://schemas.openxmlformats.org/presentationml/2006/main" xmlns:r="http://schemas.openxmlformats.org/officeDocument/2006/relationships">
+  <p:cSld>
+    <p:bg>
+      <p:bgPr>
+        <a:solidFill>
+          <a:srgbClr val="F7F5EF"/>
+        </a:solidFill>
+        <a:effectLst/>
+      </p:bgPr>
+    </p:bg>
+    <p:spTree>
+      <p:nvGrpSpPr>
+        <p:cNvPr id="1" name=""/>
+        <p:cNvGrpSpPr/>
+        <p:nvPr/>
+      </p:nvGrpSpPr>
+      <p:grpSpPr/>
+      <p:sp>
+        <p:nvSpPr>
+          <p:cNvPr id="2" name="TextBox 1"/>
+          <p:cNvSpPr txBox="1"/>
+          <p:nvPr/>
+        </p:nvSpPr>
+        <p:spPr>
+          <a:xfrm>
+            <a:off x="777240" y="320040"/>
+            <a:ext cx="10698480" cy="594360"/>
+          </a:xfrm>
+          <a:prstGeom prst="rect">
+            <a:avLst/>
+          </a:prstGeom>
+          <a:noFill/>
+        </p:spPr>
+        <p:txBody>
+          <a:bodyPr wrap="square" lIns="0" rIns="0">
+            <a:spAutoFit/>
+          </a:bodyPr>
+          <a:lstStyle/>
+          <a:p>
+            <a:r>
+              <a:rPr sz="2900" b="1">
+                <a:solidFill>
+                  <a:srgbClr val="102A43"/>
+                </a:solidFill>
+                <a:latin typeface="Nimbus Sans"/>
+              </a:rPr>
+              <a:t>Eligibility is anchored to dialysis minute 120</a:t>
+            </a:r>
+          </a:p>
+        </p:txBody>
+      </p:sp>
+      <p:sp>
+        <p:nvSpPr>
+          <p:cNvPr id="3" name="TextBox 2"/>
+          <p:cNvSpPr txBox="1"/>
+          <p:nvPr/>
+        </p:nvSpPr>
+        <p:spPr>
+          <a:xfrm>
+            <a:off x="777240" y="987552"/>
+            <a:ext cx="10698480" cy="502920"/>
+          </a:xfrm>
+          <a:prstGeom prst="rect">
+            <a:avLst/>
+          </a:prstGeom>
+          <a:noFill/>
+        </p:spPr>
+        <p:txBody>
+          <a:bodyPr wrap="square" lIns="0" rIns="0">
+            <a:spAutoFit/>
+          </a:bodyPr>
+          <a:lstStyle/>
+          <a:p>
+            <a:r>
+              <a:rPr sz="1600" b="0">
+                <a:solidFill>
+                  <a:srgbClr val="627D98"/>
+                </a:solidFill>
+                <a:latin typeface="Nimbus Sans"/>
+              </a:rPr>
+              <a:t>Retrospective eligibility does not guarantee a 120-minute warning</a:t>
+            </a:r>
+          </a:p>
+        </p:txBody>
+      </p:sp>
+      <p:sp>
+        <p:nvSpPr>
+          <p:cNvPr id="4" name="TextBox 3"/>
+          <p:cNvSpPr txBox="1"/>
+          <p:nvPr/>
+        </p:nvSpPr>
+        <p:spPr>
+          <a:xfrm>
+            <a:off x="777240" y="1783080"/>
+            <a:ext cx="10515600" cy="384048"/>
+          </a:xfrm>
+          <a:prstGeom prst="rect">
+            <a:avLst/>
+          </a:prstGeom>
+          <a:noFill/>
+        </p:spPr>
+        <p:txBody>
+          <a:bodyPr wrap="square" lIns="0" rIns="0">
+            <a:spAutoFit/>
+          </a:bodyPr>
+          <a:lstStyle/>
+          <a:p>
+            <a:r>
+              <a:rPr sz="2100" b="1">
+                <a:solidFill>
+                  <a:srgbClr val="0E7C7B"/>
+                </a:solidFill>
+                <a:latin typeface="Nimbus Sans"/>
+              </a:rPr>
+              <a:t>Prediction time</a:t>
+            </a:r>
+          </a:p>
+        </p:txBody>
+      </p:sp>
+      <p:sp>
+        <p:nvSpPr>
+          <p:cNvPr id="5" name="TextBox 4"/>
+          <p:cNvSpPr txBox="1"/>
+          <p:nvPr/>
+        </p:nvSpPr>
+        <p:spPr>
+          <a:xfrm>
+            <a:off x="777240" y="2221991"/>
+            <a:ext cx="10515600" cy="749808"/>
+          </a:xfrm>
+          <a:prstGeom prst="rect">
+            <a:avLst/>
+          </a:prstGeom>
+          <a:noFill/>
+        </p:spPr>
+        <p:txBody>
+          <a:bodyPr wrap="square" lIns="0" rIns="0">
+            <a:spAutoFit/>
+          </a:bodyPr>
+          <a:lstStyle/>
+          <a:p>
+            <a:r>
+              <a:rPr sz="2000" b="0">
+                <a:solidFill>
+                  <a:srgbClr val="102A43"/>
+                </a:solidFill>
+                <a:latin typeface="Nimbus Sans"/>
+              </a:rPr>
+              <a:t>Earliest valid active-dialysis BP in minutes 0 to 30; index SBP must be at least 90 mmHg.</a:t>
+            </a:r>
+          </a:p>
+        </p:txBody>
+      </p:sp>
+      <p:sp>
+        <p:nvSpPr>
+          <p:cNvPr id="6" name="TextBox 5"/>
+          <p:cNvSpPr txBox="1"/>
+          <p:nvPr/>
+        </p:nvSpPr>
+        <p:spPr>
+          <a:xfrm>
+            <a:off x="777240" y="3200400"/>
+            <a:ext cx="10515600" cy="384048"/>
+          </a:xfrm>
+          <a:prstGeom prst="rect">
+            <a:avLst/>
+          </a:prstGeom>
+          <a:noFill/>
+        </p:spPr>
+        <p:txBody>
+          <a:bodyPr wrap="square" lIns="0" rIns="0">
+            <a:spAutoFit/>
+          </a:bodyPr>
+          <a:lstStyle/>
+          <a:p>
+            <a:r>
+              <a:rPr sz="2100" b="1">
+                <a:solidFill>
+                  <a:srgbClr val="0E7C7B"/>
+                </a:solidFill>
+                <a:latin typeface="Nimbus Sans"/>
+              </a:rPr>
+              <a:t>Later observation</a:t>
+            </a:r>
+          </a:p>
+        </p:txBody>
+      </p:sp>
+      <p:sp>
+        <p:nvSpPr>
+          <p:cNvPr id="7" name="TextBox 6"/>
+          <p:cNvSpPr txBox="1"/>
+          <p:nvPr/>
+        </p:nvSpPr>
+        <p:spPr>
+          <a:xfrm>
+            <a:off x="777240" y="3639312"/>
+            <a:ext cx="10515600" cy="749808"/>
+          </a:xfrm>
+          <a:prstGeom prst="rect">
+            <a:avLst/>
+          </a:prstGeom>
+          <a:noFill/>
+        </p:spPr>
+        <p:txBody>
+          <a:bodyPr wrap="square" lIns="0" rIns="0">
+            <a:spAutoFit/>
+          </a:bodyPr>
+          <a:lstStyle/>
+          <a:p>
+            <a:r>
+              <a:rPr sz="2000" b="0">
+                <a:solidFill>
+                  <a:srgbClr val="102A43"/>
+                </a:solidFill>
+                <a:latin typeface="Nimbus Sans"/>
+              </a:rPr>
+              <a:t>Require two distinct post-index measurement minutes and an observation at dialysis minute 120 or later.</a:t>
+            </a:r>
+          </a:p>
+        </p:txBody>
+      </p:sp>
+      <p:sp>
+        <p:nvSpPr>
+          <p:cNvPr id="8" name="TextBox 7"/>
+          <p:cNvSpPr txBox="1"/>
+          <p:nvPr/>
+        </p:nvSpPr>
+        <p:spPr>
+          <a:xfrm>
+            <a:off x="777240" y="4617720"/>
+            <a:ext cx="10515600" cy="384048"/>
+          </a:xfrm>
+          <a:prstGeom prst="rect">
+            <a:avLst/>
+          </a:prstGeom>
+          <a:noFill/>
+        </p:spPr>
+        <p:txBody>
+          <a:bodyPr wrap="square" lIns="0" rIns="0">
+            <a:spAutoFit/>
+          </a:bodyPr>
+          <a:lstStyle/>
+          <a:p>
+            <a:r>
+              <a:rPr sz="2100" b="1">
+                <a:solidFill>
+                  <a:srgbClr val="0E7C7B"/>
+                </a:solidFill>
+                <a:latin typeface="Nimbus Sans"/>
+              </a:rPr>
+              <a:t>Example</a:t>
+            </a:r>
+          </a:p>
+        </p:txBody>
+      </p:sp>
+      <p:sp>
+        <p:nvSpPr>
+          <p:cNvPr id="9" name="TextBox 8"/>
+          <p:cNvSpPr txBox="1"/>
+          <p:nvPr/>
+        </p:nvSpPr>
+        <p:spPr>
+          <a:xfrm>
+            <a:off x="777240" y="5056631"/>
+            <a:ext cx="10515600" cy="749808"/>
+          </a:xfrm>
+          <a:prstGeom prst="rect">
+            <a:avLst/>
+          </a:prstGeom>
+          <a:noFill/>
+        </p:spPr>
+        <p:txBody>
+          <a:bodyPr wrap="square" lIns="0" rIns="0">
+            <a:spAutoFit/>
+          </a:bodyPr>
+          <a:lstStyle/>
+          <a:p>
+            <a:r>
+              <a:rPr sz="2000" b="0">
+                <a:solidFill>
+                  <a:srgbClr val="102A43"/>
+                </a:solidFill>
+                <a:latin typeface="Nimbus Sans"/>
+              </a:rPr>
+              <a:t>Index at minute 20 and observation at minute 120 can qualify. Actual time to the first event has not yet been measured.</a:t>
+            </a:r>
+          </a:p>
+        </p:txBody>
+      </p:sp>
+      <p:sp>
+        <p:nvSpPr>
+          <p:cNvPr id="10" name="TextBox 9"/>
+          <p:cNvSpPr txBox="1"/>
+          <p:nvPr/>
+        </p:nvSpPr>
+        <p:spPr>
+          <a:xfrm>
+            <a:off x="777240" y="6446520"/>
+            <a:ext cx="10515600" cy="228600"/>
+          </a:xfrm>
+          <a:prstGeom prst="rect">
+            <a:avLst/>
+          </a:prstGeom>
+          <a:noFill/>
+        </p:spPr>
+        <p:txBody>
+          <a:bodyPr wrap="square" lIns="0" rIns="0">
+            <a:spAutoFit/>
+          </a:bodyPr>
+          <a:lstStyle/>
+          <a:p>
+            <a:r>
+              <a:rPr sz="1000" b="0">
+                <a:solidFill>
+                  <a:srgbClr val="627D98"/>
+                </a:solidFill>
+                <a:latin typeface="Nimbus Sans"/>
+              </a:rPr>
+              <a:t>DIAL-ALERT | Academic prototype</a:t>
+            </a:r>
+          </a:p>
+        </p:txBody>
+      </p:sp>
+    </p:spTree>
+  </p:cSld>
+  <p:clrMapOvr>
+    <a:masterClrMapping/>
+  </p:clrMapOvr>
+</p:sld>
+</file>
+
+<file path=ppt/slides/slide13.xml><?xml version="1.0" encoding="utf-8"?>
+<p:sld xmlns:a="http://schemas.openxmlformats.org/drawingml/2006/main" xmlns:p="http://schemas.openxmlformats.org/presentationml/2006/main" xmlns:r="http://schemas.openxmlformats.org/officeDocument/2006/relationships">
+  <p:cSld>
+    <p:bg>
+      <p:bgPr>
+        <a:solidFill>
+          <a:srgbClr val="F7F5EF"/>
+        </a:solidFill>
+        <a:effectLst/>
+      </p:bgPr>
+    </p:bg>
+    <p:spTree>
+      <p:nvGrpSpPr>
+        <p:cNvPr id="1" name=""/>
+        <p:cNvGrpSpPr/>
+        <p:nvPr/>
+      </p:nvGrpSpPr>
+      <p:grpSpPr/>
+      <p:sp>
+        <p:nvSpPr>
+          <p:cNvPr id="2" name="TextBox 1"/>
+          <p:cNvSpPr txBox="1"/>
+          <p:nvPr/>
+        </p:nvSpPr>
+        <p:spPr>
+          <a:xfrm>
+            <a:off x="777240" y="320040"/>
+            <a:ext cx="10698480" cy="594360"/>
+          </a:xfrm>
+          <a:prstGeom prst="rect">
+            <a:avLst/>
+          </a:prstGeom>
+          <a:noFill/>
+        </p:spPr>
+        <p:txBody>
+          <a:bodyPr wrap="square" lIns="0" rIns="0">
+            <a:spAutoFit/>
+          </a:bodyPr>
+          <a:lstStyle/>
+          <a:p>
+            <a:r>
+              <a:rPr sz="2900" b="1">
+                <a:solidFill>
+                  <a:srgbClr val="102A43"/>
+                </a:solidFill>
+                <a:latin typeface="Nimbus Sans"/>
+              </a:rPr>
+              <a:t>Two alert policies produce different workloads</a:t>
+            </a:r>
+          </a:p>
+        </p:txBody>
+      </p:sp>
+      <p:sp>
+        <p:nvSpPr>
+          <p:cNvPr id="3" name="TextBox 2"/>
+          <p:cNvSpPr txBox="1"/>
+          <p:nvPr/>
+        </p:nvSpPr>
+        <p:spPr>
+          <a:xfrm>
+            <a:off x="777240" y="987552"/>
+            <a:ext cx="10698480" cy="502920"/>
+          </a:xfrm>
+          <a:prstGeom prst="rect">
+            <a:avLst/>
+          </a:prstGeom>
+          <a:noFill/>
+        </p:spPr>
+        <p:txBody>
+          <a:bodyPr wrap="square" lIns="0" rIns="0">
+            <a:spAutoFit/>
+          </a:bodyPr>
+          <a:lstStyle/>
+          <a:p>
+            <a:r>
+              <a:rPr sz="1600" b="0">
+                <a:solidFill>
+                  <a:srgbClr val="627D98"/>
+                </a:solidFill>
+                <a:latin typeface="Nimbus Sans"/>
+              </a:rPr>
+              <a:t>Locked retrospective test results; define the prospective ranking batch</a:t>
+            </a:r>
+          </a:p>
+        </p:txBody>
+      </p:sp>
+      <p:sp>
+        <p:nvSpPr>
+          <p:cNvPr id="4" name="TextBox 3"/>
+          <p:cNvSpPr txBox="1"/>
+          <p:nvPr/>
+        </p:nvSpPr>
+        <p:spPr>
+          <a:xfrm>
+            <a:off x="777240" y="1783080"/>
+            <a:ext cx="10515600" cy="384048"/>
+          </a:xfrm>
+          <a:prstGeom prst="rect">
+            <a:avLst/>
+          </a:prstGeom>
+          <a:noFill/>
+        </p:spPr>
+        <p:txBody>
+          <a:bodyPr wrap="square" lIns="0" rIns="0">
+            <a:spAutoFit/>
+          </a:bodyPr>
+          <a:lstStyle/>
+          <a:p>
+            <a:r>
+              <a:rPr sz="2100" b="1">
+                <a:solidFill>
+                  <a:srgbClr val="0E7C7B"/>
+                </a:solidFill>
+                <a:latin typeface="Nimbus Sans"/>
+              </a:rPr>
+              <a:t>Fixed probability threshold of 0.143</a:t>
+            </a:r>
+          </a:p>
+        </p:txBody>
+      </p:sp>
+      <p:sp>
+        <p:nvSpPr>
+          <p:cNvPr id="5" name="TextBox 4"/>
+          <p:cNvSpPr txBox="1"/>
+          <p:nvPr/>
+        </p:nvSpPr>
+        <p:spPr>
+          <a:xfrm>
+            <a:off x="777240" y="2221991"/>
+            <a:ext cx="10515600" cy="749808"/>
+          </a:xfrm>
+          <a:prstGeom prst="rect">
+            <a:avLst/>
+          </a:prstGeom>
+          <a:noFill/>
+        </p:spPr>
+        <p:txBody>
+          <a:bodyPr wrap="square" lIns="0" rIns="0">
+            <a:spAutoFit/>
+          </a:bodyPr>
+          <a:lstStyle/>
+          <a:p>
+            <a:r>
+              <a:rPr sz="2000" b="0">
+                <a:solidFill>
+                  <a:srgbClr val="102A43"/>
+                </a:solidFill>
+                <a:latin typeface="Nimbus Sans"/>
+              </a:rPr>
+              <a:t>Sensitivity 66.1%; precision 30.6%; 18.3 reviews and 12.7 false alerts per 100 sessions.</a:t>
+            </a:r>
+          </a:p>
+        </p:txBody>
+      </p:sp>
+      <p:sp>
+        <p:nvSpPr>
+          <p:cNvPr id="6" name="TextBox 5"/>
+          <p:cNvSpPr txBox="1"/>
+          <p:nvPr/>
+        </p:nvSpPr>
+        <p:spPr>
+          <a:xfrm>
+            <a:off x="777240" y="3200400"/>
+            <a:ext cx="10515600" cy="384048"/>
+          </a:xfrm>
+          <a:prstGeom prst="rect">
+            <a:avLst/>
+          </a:prstGeom>
+          <a:noFill/>
+        </p:spPr>
+        <p:txBody>
+          <a:bodyPr wrap="square" lIns="0" rIns="0">
+            <a:spAutoFit/>
+          </a:bodyPr>
+          <a:lstStyle/>
+          <a:p>
+            <a:r>
+              <a:rPr sz="2100" b="1">
+                <a:solidFill>
+                  <a:srgbClr val="0E7C7B"/>
+                </a:solidFill>
+                <a:latin typeface="Nimbus Sans"/>
+              </a:rPr>
+              <a:t>Review the highest-risk 20%</a:t>
+            </a:r>
+          </a:p>
+        </p:txBody>
+      </p:sp>
+      <p:sp>
+        <p:nvSpPr>
+          <p:cNvPr id="7" name="TextBox 6"/>
+          <p:cNvSpPr txBox="1"/>
+          <p:nvPr/>
+        </p:nvSpPr>
+        <p:spPr>
+          <a:xfrm>
+            <a:off x="777240" y="3639312"/>
+            <a:ext cx="10515600" cy="749808"/>
+          </a:xfrm>
+          <a:prstGeom prst="rect">
+            <a:avLst/>
+          </a:prstGeom>
+          <a:noFill/>
+        </p:spPr>
+        <p:txBody>
+          <a:bodyPr wrap="square" lIns="0" rIns="0">
+            <a:spAutoFit/>
+          </a:bodyPr>
+          <a:lstStyle/>
+          <a:p>
+            <a:r>
+              <a:rPr sz="2000" b="0">
+                <a:solidFill>
+                  <a:srgbClr val="102A43"/>
+                </a:solidFill>
+                <a:latin typeface="Nimbus Sans"/>
+              </a:rPr>
+              <a:t>Recall 69.1%; precision 29.4%; 20 reviews and 14.1 false alerts per 100 sessions.</a:t>
+            </a:r>
+          </a:p>
+        </p:txBody>
+      </p:sp>
+      <p:sp>
+        <p:nvSpPr>
+          <p:cNvPr id="8" name="TextBox 7"/>
+          <p:cNvSpPr txBox="1"/>
+          <p:nvPr/>
+        </p:nvSpPr>
+        <p:spPr>
+          <a:xfrm>
+            <a:off x="777240" y="4617720"/>
+            <a:ext cx="10515600" cy="384048"/>
+          </a:xfrm>
+          <a:prstGeom prst="rect">
+            <a:avLst/>
+          </a:prstGeom>
+          <a:noFill/>
+        </p:spPr>
+        <p:txBody>
+          <a:bodyPr wrap="square" lIns="0" rIns="0">
+            <a:spAutoFit/>
+          </a:bodyPr>
+          <a:lstStyle/>
+          <a:p>
+            <a:r>
+              <a:rPr sz="2100" b="1">
+                <a:solidFill>
+                  <a:srgbClr val="0E7C7B"/>
+                </a:solidFill>
+                <a:latin typeface="Nimbus Sans"/>
+              </a:rPr>
+              <a:t>Uncertainty comes from 170 patients</a:t>
+            </a:r>
+          </a:p>
+        </p:txBody>
+      </p:sp>
+      <p:sp>
+        <p:nvSpPr>
+          <p:cNvPr id="9" name="TextBox 8"/>
+          <p:cNvSpPr txBox="1"/>
+          <p:nvPr/>
+        </p:nvSpPr>
+        <p:spPr>
+          <a:xfrm>
+            <a:off x="777240" y="5056631"/>
+            <a:ext cx="10515600" cy="749808"/>
+          </a:xfrm>
+          <a:prstGeom prst="rect">
+            <a:avLst/>
+          </a:prstGeom>
+          <a:noFill/>
+        </p:spPr>
+        <p:txBody>
+          <a:bodyPr wrap="square" lIns="0" rIns="0">
+            <a:spAutoFit/>
+          </a:bodyPr>
+          <a:lstStyle/>
+          <a:p>
+            <a:r>
+              <a:rPr sz="2000" b="0">
+                <a:solidFill>
+                  <a:srgbClr val="102A43"/>
+                </a:solidFill>
+                <a:latin typeface="Nimbus Sans"/>
+              </a:rPr>
+              <a:t>95% CI: threshold sensitivity 55.0% to 74.5%; capacity recall 63.2% to 74.4%. Sessions are clustered within patients.</a:t>
+            </a:r>
+          </a:p>
+        </p:txBody>
+      </p:sp>
+      <p:sp>
+        <p:nvSpPr>
+          <p:cNvPr id="10" name="TextBox 9"/>
+          <p:cNvSpPr txBox="1"/>
+          <p:nvPr/>
+        </p:nvSpPr>
+        <p:spPr>
+          <a:xfrm>
+            <a:off x="777240" y="6446520"/>
+            <a:ext cx="10515600" cy="228600"/>
+          </a:xfrm>
+          <a:prstGeom prst="rect">
+            <a:avLst/>
+          </a:prstGeom>
+          <a:noFill/>
+        </p:spPr>
+        <p:txBody>
+          <a:bodyPr wrap="square" lIns="0" rIns="0">
+            <a:spAutoFit/>
+          </a:bodyPr>
+          <a:lstStyle/>
+          <a:p>
+            <a:r>
+              <a:rPr sz="1000" b="0">
+                <a:solidFill>
+                  <a:srgbClr val="627D98"/>
+                </a:solidFill>
+                <a:latin typeface="Nimbus Sans"/>
+              </a:rPr>
+              <a:t>DIAL-ALERT | Academic prototype</a:t>
+            </a:r>
+          </a:p>
+        </p:txBody>
+      </p:sp>
+    </p:spTree>
+  </p:cSld>
+  <p:clrMapOvr>
+    <a:masterClrMapping/>
+  </p:clrMapOvr>
+</p:sld>
+</file>
+
+<file path=ppt/slides/slide14.xml><?xml version="1.0" encoding="utf-8"?>
+<p:sld xmlns:a="http://schemas.openxmlformats.org/drawingml/2006/main" xmlns:p="http://schemas.openxmlformats.org/presentationml/2006/main" xmlns:r="http://schemas.openxmlformats.org/officeDocument/2006/relationships">
+  <p:cSld>
+    <p:bg>
+      <p:bgPr>
+        <a:solidFill>
+          <a:srgbClr val="F7F5EF"/>
+        </a:solidFill>
+        <a:effectLst/>
+      </p:bgPr>
+    </p:bg>
+    <p:spTree>
+      <p:nvGrpSpPr>
+        <p:cNvPr id="1" name=""/>
+        <p:cNvGrpSpPr/>
+        <p:nvPr/>
+      </p:nvGrpSpPr>
+      <p:grpSpPr/>
+      <p:sp>
+        <p:nvSpPr>
+          <p:cNvPr id="2" name="TextBox 1"/>
+          <p:cNvSpPr txBox="1"/>
+          <p:nvPr/>
+        </p:nvSpPr>
+        <p:spPr>
+          <a:xfrm>
+            <a:off x="777240" y="320040"/>
+            <a:ext cx="10698480" cy="594360"/>
+          </a:xfrm>
+          <a:prstGeom prst="rect">
+            <a:avLst/>
+          </a:prstGeom>
+          <a:noFill/>
+        </p:spPr>
+        <p:txBody>
+          <a:bodyPr wrap="square" lIns="0" rIns="0">
+            <a:spAutoFit/>
+          </a:bodyPr>
+          <a:lstStyle/>
+          <a:p>
+            <a:r>
+              <a:rPr sz="2900" b="1">
+                <a:solidFill>
+                  <a:srgbClr val="102A43"/>
+                </a:solidFill>
+                <a:latin typeface="Nimbus Sans"/>
+              </a:rPr>
+              <a:t>Optional steps demonstrate different capabilities</a:t>
+            </a:r>
+          </a:p>
+        </p:txBody>
+      </p:sp>
+      <p:sp>
+        <p:nvSpPr>
+          <p:cNvPr id="3" name="TextBox 2"/>
+          <p:cNvSpPr txBox="1"/>
+          <p:nvPr/>
+        </p:nvSpPr>
+        <p:spPr>
+          <a:xfrm>
+            <a:off x="777240" y="987552"/>
+            <a:ext cx="10698480" cy="502920"/>
+          </a:xfrm>
+          <a:prstGeom prst="rect">
+            <a:avLst/>
+          </a:prstGeom>
+          <a:noFill/>
+        </p:spPr>
+        <p:txBody>
+          <a:bodyPr wrap="square" lIns="0" rIns="0">
+            <a:spAutoFit/>
+          </a:bodyPr>
+          <a:lstStyle/>
+          <a:p>
+            <a:r>
+              <a:rPr sz="1600" b="0">
+                <a:solidFill>
+                  <a:srgbClr val="627D98"/>
+                </a:solidFill>
+                <a:latin typeface="Nimbus Sans"/>
+              </a:rPr>
+              <a:t>Evidence is limited to the included code, checks and media</a:t>
+            </a:r>
+          </a:p>
+        </p:txBody>
+      </p:sp>
+      <p:sp>
+        <p:nvSpPr>
+          <p:cNvPr id="4" name="TextBox 3"/>
+          <p:cNvSpPr txBox="1"/>
+          <p:nvPr/>
+        </p:nvSpPr>
+        <p:spPr>
+          <a:xfrm>
+            <a:off x="777240" y="1783080"/>
+            <a:ext cx="10515600" cy="384048"/>
+          </a:xfrm>
+          <a:prstGeom prst="rect">
+            <a:avLst/>
+          </a:prstGeom>
+          <a:noFill/>
+        </p:spPr>
+        <p:txBody>
+          <a:bodyPr wrap="square" lIns="0" rIns="0">
+            <a:spAutoFit/>
+          </a:bodyPr>
+          <a:lstStyle/>
+          <a:p>
+            <a:r>
+              <a:rPr sz="2100" b="1">
+                <a:solidFill>
+                  <a:srgbClr val="0E7C7B"/>
+                </a:solidFill>
+                <a:latin typeface="Nimbus Sans"/>
+              </a:rPr>
+              <a:t>Step 8: local inference</a:t>
+            </a:r>
+          </a:p>
+        </p:txBody>
+      </p:sp>
+      <p:sp>
+        <p:nvSpPr>
+          <p:cNvPr id="5" name="TextBox 4"/>
+          <p:cNvSpPr txBox="1"/>
+          <p:nvPr/>
+        </p:nvSpPr>
+        <p:spPr>
+          <a:xfrm>
+            <a:off x="777240" y="2221991"/>
+            <a:ext cx="10515600" cy="749808"/>
+          </a:xfrm>
+          <a:prstGeom prst="rect">
+            <a:avLst/>
+          </a:prstGeom>
+          <a:noFill/>
+        </p:spPr>
+        <p:txBody>
+          <a:bodyPr wrap="square" lIns="0" rIns="0">
+            <a:spAutoFit/>
+          </a:bodyPr>
+          <a:lstStyle/>
+          <a:p>
+            <a:r>
+              <a:rPr sz="2000" b="0">
+                <a:solidFill>
+                  <a:srgbClr val="102A43"/>
+                </a:solidFill>
+                <a:latin typeface="Nimbus Sans"/>
+              </a:rPr>
+              <a:t>Flask app, synthetic request, HTTP execution record and GIF demo. Local packaging does not establish clinical deployment.</a:t>
+            </a:r>
+          </a:p>
+        </p:txBody>
+      </p:sp>
+      <p:sp>
+        <p:nvSpPr>
+          <p:cNvPr id="6" name="TextBox 5"/>
+          <p:cNvSpPr txBox="1"/>
+          <p:nvPr/>
+        </p:nvSpPr>
+        <p:spPr>
+          <a:xfrm>
+            <a:off x="777240" y="3200400"/>
+            <a:ext cx="10515600" cy="384048"/>
+          </a:xfrm>
+          <a:prstGeom prst="rect">
+            <a:avLst/>
+          </a:prstGeom>
+          <a:noFill/>
+        </p:spPr>
+        <p:txBody>
+          <a:bodyPr wrap="square" lIns="0" rIns="0">
+            <a:spAutoFit/>
+          </a:bodyPr>
+          <a:lstStyle/>
+          <a:p>
+            <a:r>
+              <a:rPr sz="2100" b="1">
+                <a:solidFill>
+                  <a:srgbClr val="0E7C7B"/>
+                </a:solidFill>
+                <a:latin typeface="Nimbus Sans"/>
+              </a:rPr>
+              <a:t>Step 9: saved-draft replay</a:t>
+            </a:r>
+          </a:p>
+        </p:txBody>
+      </p:sp>
+      <p:sp>
+        <p:nvSpPr>
+          <p:cNvPr id="7" name="TextBox 6"/>
+          <p:cNvSpPr txBox="1"/>
+          <p:nvPr/>
+        </p:nvSpPr>
+        <p:spPr>
+          <a:xfrm>
+            <a:off x="777240" y="3639312"/>
+            <a:ext cx="10515600" cy="749808"/>
+          </a:xfrm>
+          <a:prstGeom prst="rect">
+            <a:avLst/>
+          </a:prstGeom>
+          <a:noFill/>
+        </p:spPr>
+        <p:txBody>
+          <a:bodyPr wrap="square" lIns="0" rIns="0">
+            <a:spAutoFit/>
+          </a:bodyPr>
+          <a:lstStyle/>
+          <a:p>
+            <a:r>
+              <a:rPr sz="2000" b="0">
+                <a:solidFill>
+                  <a:srgbClr val="102A43"/>
+                </a:solidFill>
+                <a:latin typeface="Nimbus Sans"/>
+              </a:rPr>
+              <a:t>The included demo replays a saved AI draft and validates numbers. It does not demonstrate a live LLM call.</a:t>
+            </a:r>
+          </a:p>
+        </p:txBody>
+      </p:sp>
+      <p:sp>
+        <p:nvSpPr>
+          <p:cNvPr id="8" name="TextBox 7"/>
+          <p:cNvSpPr txBox="1"/>
+          <p:nvPr/>
+        </p:nvSpPr>
+        <p:spPr>
+          <a:xfrm>
+            <a:off x="777240" y="4617720"/>
+            <a:ext cx="10515600" cy="384048"/>
+          </a:xfrm>
+          <a:prstGeom prst="rect">
+            <a:avLst/>
+          </a:prstGeom>
+          <a:noFill/>
+        </p:spPr>
+        <p:txBody>
+          <a:bodyPr wrap="square" lIns="0" rIns="0">
+            <a:spAutoFit/>
+          </a:bodyPr>
+          <a:lstStyle/>
+          <a:p>
+            <a:r>
+              <a:rPr sz="2100" b="1">
+                <a:solidFill>
+                  <a:srgbClr val="0E7C7B"/>
+                </a:solidFill>
+                <a:latin typeface="Nimbus Sans"/>
+              </a:rPr>
+              <a:t>Reproduction boundary</a:t>
+            </a:r>
+          </a:p>
+        </p:txBody>
+      </p:sp>
+      <p:sp>
+        <p:nvSpPr>
+          <p:cNvPr id="9" name="TextBox 8"/>
+          <p:cNvSpPr txBox="1"/>
+          <p:nvPr/>
+        </p:nvSpPr>
+        <p:spPr>
+          <a:xfrm>
+            <a:off x="777240" y="5056631"/>
+            <a:ext cx="10515600" cy="749808"/>
+          </a:xfrm>
+          <a:prstGeom prst="rect">
+            <a:avLst/>
+          </a:prstGeom>
+          <a:noFill/>
+        </p:spPr>
+        <p:txBody>
+          <a:bodyPr wrap="square" lIns="0" rIns="0">
+            <a:spAutoFit/>
+          </a:bodyPr>
+          <a:lstStyle/>
+          <a:p>
+            <a:r>
+              <a:rPr sz="2000" b="0">
+                <a:solidFill>
+                  <a:srgbClr val="102A43"/>
+                </a:solidFill>
+                <a:latin typeface="Nimbus Sans"/>
+              </a:rPr>
+              <a:t>Saved-model inference can run without source data. Full source-to-training reproduction remains blocked by HTTP 403.</a:t>
+            </a:r>
+          </a:p>
+        </p:txBody>
+      </p:sp>
+      <p:sp>
+        <p:nvSpPr>
+          <p:cNvPr id="10" name="TextBox 9"/>
+          <p:cNvSpPr txBox="1"/>
+          <p:nvPr/>
+        </p:nvSpPr>
+        <p:spPr>
+          <a:xfrm>
+            <a:off x="777240" y="6446520"/>
+            <a:ext cx="10515600" cy="228600"/>
+          </a:xfrm>
+          <a:prstGeom prst="rect">
+            <a:avLst/>
+          </a:prstGeom>
+          <a:noFill/>
+        </p:spPr>
+        <p:txBody>
+          <a:bodyPr wrap="square" lIns="0" rIns="0">
+            <a:spAutoFit/>
+          </a:bodyPr>
+          <a:lstStyle/>
+          <a:p>
+            <a:r>
+              <a:rPr sz="1000" b="0">
+                <a:solidFill>
+                  <a:srgbClr val="627D98"/>
+                </a:solidFill>
+                <a:latin typeface="Nimbus Sans"/>
+              </a:rPr>
+              <a:t>DIAL-ALERT | Academic prototype</a:t>
+            </a:r>
+          </a:p>
+        </p:txBody>
+      </p:sp>
+    </p:spTree>
+  </p:cSld>
+  <p:clrMapOvr>
+    <a:masterClrMapping/>
+  </p:clrMapOvr>
+</p:sld>
+</file>
+
+<file path=ppt/slides/slide15.xml><?xml version="1.0" encoding="utf-8"?>
+<p:sld xmlns:a="http://schemas.openxmlformats.org/drawingml/2006/main" xmlns:p="http://schemas.openxmlformats.org/presentationml/2006/main" xmlns:r="http://schemas.openxmlformats.org/officeDocument/2006/relationships">
+  <p:cSld>
+    <p:bg>
+      <p:bgPr>
+        <a:solidFill>
+          <a:srgbClr val="F7F5EF"/>
+        </a:solidFill>
+        <a:effectLst/>
+      </p:bgPr>
+    </p:bg>
+    <p:spTree>
+      <p:nvGrpSpPr>
+        <p:cNvPr id="1" name=""/>
+        <p:cNvGrpSpPr/>
+        <p:nvPr/>
+      </p:nvGrpSpPr>
+      <p:grpSpPr/>
+      <p:sp>
+        <p:nvSpPr>
+          <p:cNvPr id="2" name="TextBox 1"/>
+          <p:cNvSpPr txBox="1"/>
+          <p:nvPr/>
+        </p:nvSpPr>
+        <p:spPr>
+          <a:xfrm>
+            <a:off x="777240" y="320040"/>
+            <a:ext cx="10698480" cy="594360"/>
+          </a:xfrm>
+          <a:prstGeom prst="rect">
+            <a:avLst/>
+          </a:prstGeom>
+          <a:noFill/>
+        </p:spPr>
+        <p:txBody>
+          <a:bodyPr wrap="square" lIns="0" rIns="0">
+            <a:spAutoFit/>
+          </a:bodyPr>
+          <a:lstStyle/>
+          <a:p>
+            <a:r>
+              <a:rPr sz="2900" b="1">
+                <a:solidFill>
+                  <a:srgbClr val="102A43"/>
+                </a:solidFill>
+                <a:latin typeface="Nimbus Sans"/>
+              </a:rPr>
+              <a:t>Proposed pilot targets are not results</a:t>
+            </a:r>
+          </a:p>
+        </p:txBody>
+      </p:sp>
+      <p:sp>
+        <p:nvSpPr>
+          <p:cNvPr id="3" name="TextBox 2"/>
+          <p:cNvSpPr txBox="1"/>
+          <p:nvPr/>
+        </p:nvSpPr>
+        <p:spPr>
+          <a:xfrm>
+            <a:off x="777240" y="987552"/>
+            <a:ext cx="10698480" cy="502920"/>
+          </a:xfrm>
+          <a:prstGeom prst="rect">
+            <a:avLst/>
+          </a:prstGeom>
+          <a:noFill/>
+        </p:spPr>
+        <p:txBody>
+          <a:bodyPr wrap="square" lIns="0" rIns="0">
+            <a:spAutoFit/>
+          </a:bodyPr>
+          <a:lstStyle/>
+          <a:p>
+            <a:r>
+              <a:rPr sz="1600" b="0">
+                <a:solidFill>
+                  <a:srgbClr val="627D98"/>
+                </a:solidFill>
+                <a:latin typeface="Nimbus Sans"/>
+              </a:rPr>
+              <a:t>Prespecify one alert policy and local safety stopping rules</a:t>
+            </a:r>
+          </a:p>
+        </p:txBody>
+      </p:sp>
+      <p:sp>
+        <p:nvSpPr>
+          <p:cNvPr id="4" name="TextBox 3"/>
+          <p:cNvSpPr txBox="1"/>
+          <p:nvPr/>
+        </p:nvSpPr>
+        <p:spPr>
+          <a:xfrm>
+            <a:off x="777240" y="1783080"/>
+            <a:ext cx="10515600" cy="384048"/>
+          </a:xfrm>
+          <a:prstGeom prst="rect">
+            <a:avLst/>
+          </a:prstGeom>
+          <a:noFill/>
+        </p:spPr>
+        <p:txBody>
+          <a:bodyPr wrap="square" lIns="0" rIns="0">
+            <a:spAutoFit/>
+          </a:bodyPr>
+          <a:lstStyle/>
+          <a:p>
+            <a:r>
+              <a:rPr sz="2100" b="1">
+                <a:solidFill>
+                  <a:srgbClr val="0E7C7B"/>
+                </a:solidFill>
+                <a:latin typeface="Nimbus Sans"/>
+              </a:rPr>
+              <a:t>Event detection</a:t>
+            </a:r>
+          </a:p>
+        </p:txBody>
+      </p:sp>
+      <p:sp>
+        <p:nvSpPr>
+          <p:cNvPr id="5" name="TextBox 4"/>
+          <p:cNvSpPr txBox="1"/>
+          <p:nvPr/>
+        </p:nvSpPr>
+        <p:spPr>
+          <a:xfrm>
+            <a:off x="777240" y="2221991"/>
+            <a:ext cx="10515600" cy="749808"/>
+          </a:xfrm>
+          <a:prstGeom prst="rect">
+            <a:avLst/>
+          </a:prstGeom>
+          <a:noFill/>
+        </p:spPr>
+        <p:txBody>
+          <a:bodyPr wrap="square" lIns="0" rIns="0">
+            <a:spAutoFit/>
+          </a:bodyPr>
+          <a:lstStyle/>
+          <a:p>
+            <a:r>
+              <a:rPr sz="2000" b="0">
+                <a:solidFill>
+                  <a:srgbClr val="102A43"/>
+                </a:solidFill>
+                <a:latin typeface="Nimbus Sans"/>
+              </a:rPr>
+              <a:t>At least 65% of later SBP-below-90 events detected in eligible sessions.</a:t>
+            </a:r>
+          </a:p>
+        </p:txBody>
+      </p:sp>
+      <p:sp>
+        <p:nvSpPr>
+          <p:cNvPr id="6" name="TextBox 5"/>
+          <p:cNvSpPr txBox="1"/>
+          <p:nvPr/>
+        </p:nvSpPr>
+        <p:spPr>
+          <a:xfrm>
+            <a:off x="777240" y="3200400"/>
+            <a:ext cx="10515600" cy="384048"/>
+          </a:xfrm>
+          <a:prstGeom prst="rect">
+            <a:avLst/>
+          </a:prstGeom>
+          <a:noFill/>
+        </p:spPr>
+        <p:txBody>
+          <a:bodyPr wrap="square" lIns="0" rIns="0">
+            <a:spAutoFit/>
+          </a:bodyPr>
+          <a:lstStyle/>
+          <a:p>
+            <a:r>
+              <a:rPr sz="2100" b="1">
+                <a:solidFill>
+                  <a:srgbClr val="0E7C7B"/>
+                </a:solidFill>
+                <a:latin typeface="Nimbus Sans"/>
+              </a:rPr>
+              <a:t>False-alert workload</a:t>
+            </a:r>
+          </a:p>
+        </p:txBody>
+      </p:sp>
+      <p:sp>
+        <p:nvSpPr>
+          <p:cNvPr id="7" name="TextBox 6"/>
+          <p:cNvSpPr txBox="1"/>
+          <p:nvPr/>
+        </p:nvSpPr>
+        <p:spPr>
+          <a:xfrm>
+            <a:off x="777240" y="3639312"/>
+            <a:ext cx="10515600" cy="749808"/>
+          </a:xfrm>
+          <a:prstGeom prst="rect">
+            <a:avLst/>
+          </a:prstGeom>
+          <a:noFill/>
+        </p:spPr>
+        <p:txBody>
+          <a:bodyPr wrap="square" lIns="0" rIns="0">
+            <a:spAutoFit/>
+          </a:bodyPr>
+          <a:lstStyle/>
+          <a:p>
+            <a:r>
+              <a:rPr sz="2000" b="0">
+                <a:solidFill>
+                  <a:srgbClr val="102A43"/>
+                </a:solidFill>
+                <a:latin typeface="Nimbus Sans"/>
+              </a:rPr>
+              <a:t>No more than 15 false alerts per 100 eligible sessions.</a:t>
+            </a:r>
+          </a:p>
+        </p:txBody>
+      </p:sp>
+      <p:sp>
+        <p:nvSpPr>
+          <p:cNvPr id="8" name="TextBox 7"/>
+          <p:cNvSpPr txBox="1"/>
+          <p:nvPr/>
+        </p:nvSpPr>
+        <p:spPr>
+          <a:xfrm>
+            <a:off x="777240" y="4617720"/>
+            <a:ext cx="10515600" cy="384048"/>
+          </a:xfrm>
+          <a:prstGeom prst="rect">
+            <a:avLst/>
+          </a:prstGeom>
+          <a:noFill/>
+        </p:spPr>
+        <p:txBody>
+          <a:bodyPr wrap="square" lIns="0" rIns="0">
+            <a:spAutoFit/>
+          </a:bodyPr>
+          <a:lstStyle/>
+          <a:p>
+            <a:r>
+              <a:rPr sz="2100" b="1">
+                <a:solidFill>
+                  <a:srgbClr val="0E7C7B"/>
+                </a:solidFill>
+                <a:latin typeface="Nimbus Sans"/>
+              </a:rPr>
+              <a:t>Review time</a:t>
+            </a:r>
+          </a:p>
+        </p:txBody>
+      </p:sp>
+      <p:sp>
+        <p:nvSpPr>
+          <p:cNvPr id="9" name="TextBox 8"/>
+          <p:cNvSpPr txBox="1"/>
+          <p:nvPr/>
+        </p:nvSpPr>
+        <p:spPr>
+          <a:xfrm>
+            <a:off x="777240" y="5056631"/>
+            <a:ext cx="10515600" cy="749808"/>
+          </a:xfrm>
+          <a:prstGeom prst="rect">
+            <a:avLst/>
+          </a:prstGeom>
+          <a:noFill/>
+        </p:spPr>
+        <p:txBody>
+          <a:bodyPr wrap="square" lIns="0" rIns="0">
+            <a:spAutoFit/>
+          </a:bodyPr>
+          <a:lstStyle/>
+          <a:p>
+            <a:r>
+              <a:rPr sz="2000" b="0">
+                <a:solidFill>
+                  <a:srgbClr val="102A43"/>
+                </a:solidFill>
+                <a:latin typeface="Nimbus Sans"/>
+              </a:rPr>
+              <a:t>Median at most 2 minutes per displayed alert. Measure outcomes and full costs before claiming benefit.</a:t>
+            </a:r>
+          </a:p>
+        </p:txBody>
+      </p:sp>
+      <p:sp>
+        <p:nvSpPr>
+          <p:cNvPr id="10" name="TextBox 9"/>
+          <p:cNvSpPr txBox="1"/>
+          <p:nvPr/>
+        </p:nvSpPr>
+        <p:spPr>
+          <a:xfrm>
+            <a:off x="777240" y="6446520"/>
+            <a:ext cx="10515600" cy="228600"/>
+          </a:xfrm>
+          <a:prstGeom prst="rect">
+            <a:avLst/>
+          </a:prstGeom>
+          <a:noFill/>
+        </p:spPr>
+        <p:txBody>
+          <a:bodyPr wrap="square" lIns="0" rIns="0">
+            <a:spAutoFit/>
+          </a:bodyPr>
+          <a:lstStyle/>
+          <a:p>
+            <a:r>
+              <a:rPr sz="1000" b="0">
+                <a:solidFill>
+                  <a:srgbClr val="627D98"/>
+                </a:solidFill>
+                <a:latin typeface="Nimbus Sans"/>
+              </a:rPr>
+              <a:t>DIAL-ALERT | Academic prototype</a:t>
+            </a:r>
+          </a:p>
+        </p:txBody>
+      </p:sp>
+    </p:spTree>
+  </p:cSld>
+  <p:clrMapOvr>
+    <a:masterClrMapping/>
+  </p:clrMapOvr>
+</p:sld>
+</file>
+
+<file path=ppt/slides/slide16.xml><?xml version="1.0" encoding="utf-8"?>
 <p:sld xmlns:p="http://schemas.openxmlformats.org/presentationml/2006/main">
   <p:cSld>
     <p:bg>
@@ -6341,6 +7733,10 @@
             <a:prstDash val="solid"/>
           </a:ln>
         </p:spPr>
+        <p:txBody xmlns:a="http://schemas.openxmlformats.org/drawingml/2006/main">
+          <a:bodyPr/>
+          <a:p/>
+        </p:txBody>
       </p:sp>
       <p:sp>
         <p:nvSpPr>
@@ -6717,6 +8113,10 @@
             <a:prstDash val="solid"/>
           </a:ln>
         </p:spPr>
+        <p:txBody xmlns:a="http://schemas.openxmlformats.org/drawingml/2006/main">
+          <a:bodyPr/>
+          <a:p/>
+        </p:txBody>
       </p:sp>
       <p:sp>
         <p:nvSpPr>
@@ -6806,6 +8206,10 @@
             <a:prstDash val="solid"/>
           </a:ln>
         </p:spPr>
+        <p:txBody xmlns:a="http://schemas.openxmlformats.org/drawingml/2006/main">
+          <a:bodyPr/>
+          <a:p/>
+        </p:txBody>
       </p:sp>
       <p:sp>
         <p:nvSpPr>
@@ -6895,6 +8299,10 @@
             <a:prstDash val="solid"/>
           </a:ln>
         </p:spPr>
+        <p:txBody xmlns:a="http://schemas.openxmlformats.org/drawingml/2006/main">
+          <a:bodyPr/>
+          <a:p/>
+        </p:txBody>
       </p:sp>
       <p:sp>
         <p:nvSpPr>
@@ -6984,6 +8392,10 @@
             <a:prstDash val="solid"/>
           </a:ln>
         </p:spPr>
+        <p:txBody xmlns:a="http://schemas.openxmlformats.org/drawingml/2006/main">
+          <a:bodyPr/>
+          <a:p/>
+        </p:txBody>
       </p:sp>
       <p:sp>
         <p:nvSpPr>
@@ -7073,6 +8485,10 @@
             <a:prstDash val="solid"/>
           </a:ln>
         </p:spPr>
+        <p:txBody xmlns:a="http://schemas.openxmlformats.org/drawingml/2006/main">
+          <a:bodyPr/>
+          <a:p/>
+        </p:txBody>
       </p:sp>
       <p:sp>
         <p:nvSpPr>
@@ -7162,6 +8578,10 @@
             <a:prstDash val="solid"/>
           </a:ln>
         </p:spPr>
+        <p:txBody xmlns:a="http://schemas.openxmlformats.org/drawingml/2006/main">
+          <a:bodyPr/>
+          <a:p/>
+        </p:txBody>
       </p:sp>
       <p:sp>
         <p:nvSpPr>
@@ -7309,6 +8729,10 @@
             <a:prstDash val="solid"/>
           </a:ln>
         </p:spPr>
+        <p:txBody xmlns:a="http://schemas.openxmlformats.org/drawingml/2006/main">
+          <a:bodyPr/>
+          <a:p/>
+        </p:txBody>
       </p:sp>
       <p:sp>
         <p:nvSpPr>
@@ -7363,7 +8787,7 @@
                 <a:ea typeface="Nimbus Sans"/>
                 <a:cs typeface="Nimbus Sans"/>
               </a:rPr>
-              <a:t>DIAL-ALERT technical presentation  /  12</a:t>
+              <a:t>DIAL-ALERT technical presentation  /  16</a:t>
             </a:r>
           </a:p>
         </p:txBody>
@@ -7427,6 +8851,10 @@
             <a:prstDash val="solid"/>
           </a:ln>
         </p:spPr>
+        <p:txBody xmlns:a="http://schemas.openxmlformats.org/drawingml/2006/main">
+          <a:bodyPr/>
+          <a:p/>
+        </p:txBody>
       </p:sp>
       <p:sp>
         <p:nvSpPr>
@@ -7632,6 +9060,10 @@
             <a:prstDash val="solid"/>
           </a:ln>
         </p:spPr>
+        <p:txBody xmlns:a="http://schemas.openxmlformats.org/drawingml/2006/main">
+          <a:bodyPr/>
+          <a:p/>
+        </p:txBody>
       </p:sp>
       <p:sp>
         <p:nvSpPr>
@@ -7779,6 +9211,10 @@
             <a:prstDash val="solid"/>
           </a:ln>
         </p:spPr>
+        <p:txBody xmlns:a="http://schemas.openxmlformats.org/drawingml/2006/main">
+          <a:bodyPr/>
+          <a:p/>
+        </p:txBody>
       </p:sp>
       <p:sp>
         <p:nvSpPr>
@@ -7926,6 +9362,10 @@
             <a:prstDash val="solid"/>
           </a:ln>
         </p:spPr>
+        <p:txBody xmlns:a="http://schemas.openxmlformats.org/drawingml/2006/main">
+          <a:bodyPr/>
+          <a:p/>
+        </p:txBody>
       </p:sp>
       <p:sp>
         <p:nvSpPr>
@@ -8073,6 +9513,10 @@
             <a:prstDash val="solid"/>
           </a:ln>
         </p:spPr>
+        <p:txBody xmlns:a="http://schemas.openxmlformats.org/drawingml/2006/main">
+          <a:bodyPr/>
+          <a:p/>
+        </p:txBody>
       </p:sp>
       <p:sp>
         <p:nvSpPr>
@@ -8800,6 +10244,10 @@
             <a:prstDash val="solid"/>
           </a:ln>
         </p:spPr>
+        <p:txBody xmlns:a="http://schemas.openxmlformats.org/drawingml/2006/main">
+          <a:bodyPr/>
+          <a:p/>
+        </p:txBody>
       </p:sp>
       <p:sp>
         <p:nvSpPr>
@@ -8918,6 +10366,10 @@
             <a:prstDash val="solid"/>
           </a:ln>
         </p:spPr>
+        <p:txBody xmlns:a="http://schemas.openxmlformats.org/drawingml/2006/main">
+          <a:bodyPr/>
+          <a:p/>
+        </p:txBody>
       </p:sp>
       <p:sp>
         <p:nvSpPr>
@@ -9545,6 +10997,10 @@
             <a:prstDash val="solid"/>
           </a:ln>
         </p:spPr>
+        <p:txBody xmlns:a="http://schemas.openxmlformats.org/drawingml/2006/main">
+          <a:bodyPr/>
+          <a:p/>
+        </p:txBody>
       </p:sp>
       <p:sp>
         <p:nvSpPr>
@@ -9663,6 +11119,10 @@
             <a:prstDash val="solid"/>
           </a:ln>
         </p:spPr>
+        <p:txBody xmlns:a="http://schemas.openxmlformats.org/drawingml/2006/main">
+          <a:bodyPr/>
+          <a:p/>
+        </p:txBody>
       </p:sp>
       <p:sp>
         <p:nvSpPr>
@@ -10175,6 +11635,10 @@
             <a:prstDash val="solid"/>
           </a:ln>
         </p:spPr>
+        <p:txBody xmlns:a="http://schemas.openxmlformats.org/drawingml/2006/main">
+          <a:bodyPr/>
+          <a:p/>
+        </p:txBody>
       </p:sp>
       <p:sp>
         <p:nvSpPr>
@@ -10322,6 +11786,10 @@
             <a:prstDash val="solid"/>
           </a:ln>
         </p:spPr>
+        <p:txBody xmlns:a="http://schemas.openxmlformats.org/drawingml/2006/main">
+          <a:bodyPr/>
+          <a:p/>
+        </p:txBody>
       </p:sp>
       <p:sp>
         <p:nvSpPr>
@@ -10469,6 +11937,10 @@
             <a:prstDash val="solid"/>
           </a:ln>
         </p:spPr>
+        <p:txBody xmlns:a="http://schemas.openxmlformats.org/drawingml/2006/main">
+          <a:bodyPr/>
+          <a:p/>
+        </p:txBody>
       </p:sp>
       <p:sp>
         <p:nvSpPr>
@@ -10616,6 +12088,10 @@
             <a:prstDash val="solid"/>
           </a:ln>
         </p:spPr>
+        <p:txBody xmlns:a="http://schemas.openxmlformats.org/drawingml/2006/main">
+          <a:bodyPr/>
+          <a:p/>
+        </p:txBody>
       </p:sp>
       <p:sp>
         <p:nvSpPr>
@@ -10763,6 +12239,10 @@
             <a:prstDash val="solid"/>
           </a:ln>
         </p:spPr>
+        <p:txBody xmlns:a="http://schemas.openxmlformats.org/drawingml/2006/main">
+          <a:bodyPr/>
+          <a:p/>
+        </p:txBody>
       </p:sp>
       <p:sp>
         <p:nvSpPr>
@@ -10910,6 +12390,10 @@
             <a:prstDash val="solid"/>
           </a:ln>
         </p:spPr>
+        <p:txBody xmlns:a="http://schemas.openxmlformats.org/drawingml/2006/main">
+          <a:bodyPr/>
+          <a:p/>
+        </p:txBody>
       </p:sp>
       <p:sp>
         <p:nvSpPr>
@@ -11028,6 +12512,10 @@
             <a:prstDash val="solid"/>
           </a:ln>
         </p:spPr>
+        <p:txBody xmlns:a="http://schemas.openxmlformats.org/drawingml/2006/main">
+          <a:bodyPr/>
+          <a:p/>
+        </p:txBody>
       </p:sp>
       <p:sp>
         <p:nvSpPr>
@@ -11314,6 +12802,10 @@
             <a:prstDash val="solid"/>
           </a:ln>
         </p:spPr>
+        <p:txBody xmlns:a="http://schemas.openxmlformats.org/drawingml/2006/main">
+          <a:bodyPr/>
+          <a:p/>
+        </p:txBody>
       </p:sp>
       <p:sp>
         <p:nvSpPr>
@@ -11484,6 +12976,10 @@
             <a:prstDash val="solid"/>
           </a:ln>
         </p:spPr>
+        <p:txBody xmlns:a="http://schemas.openxmlformats.org/drawingml/2006/main">
+          <a:bodyPr/>
+          <a:p/>
+        </p:txBody>
       </p:sp>
       <p:sp>
         <p:nvSpPr>
@@ -11712,6 +13208,10 @@
             <a:prstDash val="solid"/>
           </a:ln>
         </p:spPr>
+        <p:txBody xmlns:a="http://schemas.openxmlformats.org/drawingml/2006/main">
+          <a:bodyPr/>
+          <a:p/>
+        </p:txBody>
       </p:sp>
       <p:sp>
         <p:nvSpPr>
@@ -12621,6 +14121,10 @@
             <a:prstDash val="solid"/>
           </a:ln>
         </p:spPr>
+        <p:txBody xmlns:a="http://schemas.openxmlformats.org/drawingml/2006/main">
+          <a:bodyPr/>
+          <a:p/>
+        </p:txBody>
       </p:sp>
       <p:sp>
         <p:nvSpPr>
@@ -12739,6 +14243,10 @@
             <a:prstDash val="solid"/>
           </a:ln>
         </p:spPr>
+        <p:txBody xmlns:a="http://schemas.openxmlformats.org/drawingml/2006/main">
+          <a:bodyPr/>
+          <a:p/>
+        </p:txBody>
       </p:sp>
       <p:sp>
         <p:nvSpPr>
@@ -12793,7 +14301,7 @@
                 <a:ea typeface="Nimbus Sans"/>
                 <a:cs typeface="Nimbus Sans"/>
               </a:rPr>
-              <a:t>Random forest balances ranking and probability quality</a:t>
+              <a:t>Random forest met the prespecified selection rule</a:t>
             </a:r>
           </a:p>
         </p:txBody>
@@ -13215,7 +14723,7 @@
                 <a:ea typeface="Nimbus Sans"/>
                 <a:cs typeface="Nimbus Sans"/>
               </a:rPr>
-              <a:t>Histogram boosting ranked slightly higher on CV AP (0.446), but its validation Brier score was 0.134. The difference in AP was within the predefined 0.01 tolerance.</a:t>
+              <a:t>Boosting CV AP: 0.446; RF: 0.440. Brier comparison used candidates as fitted. Equal calibration remains untested.</a:t>
             </a:r>
           </a:p>
         </p:txBody>
@@ -13366,6 +14874,10 @@
             <a:prstDash val="solid"/>
           </a:ln>
         </p:spPr>
+        <p:txBody xmlns:a="http://schemas.openxmlformats.org/drawingml/2006/main">
+          <a:bodyPr/>
+          <a:p/>
+        </p:txBody>
       </p:sp>
       <p:sp>
         <p:nvSpPr>
@@ -13484,6 +14996,10 @@
             <a:prstDash val="solid"/>
           </a:ln>
         </p:spPr>
+        <p:txBody xmlns:a="http://schemas.openxmlformats.org/drawingml/2006/main">
+          <a:bodyPr/>
+          <a:p/>
+        </p:txBody>
       </p:sp>
       <p:sp>
         <p:nvSpPr>
@@ -14001,6 +15517,10 @@
             <a:prstDash val="solid"/>
           </a:ln>
         </p:spPr>
+        <p:txBody xmlns:a="http://schemas.openxmlformats.org/drawingml/2006/main">
+          <a:bodyPr/>
+          <a:p/>
+        </p:txBody>
       </p:sp>
       <p:sp>
         <p:nvSpPr>
@@ -14252,6 +15772,10 @@
             <a:prstDash val="solid"/>
           </a:ln>
         </p:spPr>
+        <p:txBody xmlns:a="http://schemas.openxmlformats.org/drawingml/2006/main">
+          <a:bodyPr/>
+          <a:p/>
+        </p:txBody>
       </p:sp>
       <p:sp>
         <p:nvSpPr>
@@ -14370,6 +15894,10 @@
             <a:prstDash val="solid"/>
           </a:ln>
         </p:spPr>
+        <p:txBody xmlns:a="http://schemas.openxmlformats.org/drawingml/2006/main">
+          <a:bodyPr/>
+          <a:p/>
+        </p:txBody>
       </p:sp>
       <p:sp>
         <p:nvSpPr>
@@ -15055,6 +16583,10 @@
             <a:prstDash val="solid"/>
           </a:ln>
         </p:spPr>
+        <p:txBody xmlns:a="http://schemas.openxmlformats.org/drawingml/2006/main">
+          <a:bodyPr/>
+          <a:p/>
+        </p:txBody>
       </p:sp>
       <p:sp>
         <p:nvSpPr>
@@ -15173,6 +16705,10 @@
             <a:prstDash val="solid"/>
           </a:ln>
         </p:spPr>
+        <p:txBody xmlns:a="http://schemas.openxmlformats.org/drawingml/2006/main">
+          <a:bodyPr/>
+          <a:p/>
+        </p:txBody>
       </p:sp>
       <p:sp>
         <p:nvSpPr>
@@ -15571,6 +17107,10 @@
             <a:prstDash val="solid"/>
           </a:ln>
         </p:spPr>
+        <p:txBody xmlns:a="http://schemas.openxmlformats.org/drawingml/2006/main">
+          <a:bodyPr/>
+          <a:p/>
+        </p:txBody>
       </p:sp>
       <p:sp>
         <p:nvSpPr>
@@ -15776,6 +17316,10 @@
             <a:prstDash val="solid"/>
           </a:ln>
         </p:spPr>
+        <p:txBody xmlns:a="http://schemas.openxmlformats.org/drawingml/2006/main">
+          <a:bodyPr/>
+          <a:p/>
+        </p:txBody>
       </p:sp>
       <p:sp>
         <p:nvSpPr>

--- a/reports/Franklin_Guillano_DIAL_ALERT_Technical_Presentation.pptx
+++ b/reports/Franklin_Guillano_DIAL_ALERT_Technical_Presentation.pptx
@@ -4394,7 +4394,7 @@
                 <a:ea typeface="Nimbus Sans"/>
                 <a:cs typeface="Nimbus Sans"/>
               </a:rPr>
-              <a:t>Reproduction instructions are provided; full rerun is blocked</a:t>
+              <a:t>End-to-end reproduction successfully completed</a:t>
             </a:r>
           </a:p>
         </p:txBody>
@@ -4452,7 +4452,7 @@
                 <a:ea typeface="Nimbus Sans"/>
                 <a:cs typeface="Nimbus Sans"/>
               </a:rPr>
-              <a:t>Clean environment installed; source acquisition returned HTTP 403</a:t>
+              <a:t>Fresh Python 3.12 reproduction completed on 20 September 2026</a:t>
             </a:r>
           </a:p>
         </p:txBody>
@@ -6190,7 +6190,7 @@
                 <a:ea typeface="Nimbus Sans"/>
                 <a:cs typeface="Nimbus Sans"/>
               </a:rPr>
-              <a:t>Execution record: included-model checks passed; full data-to-training run is blocked.</a:t>
+              <a:t>HEMOBP Version 3 was reacquired and checksum-verified; the dataset was rebuilt, models retrained, outputs regenerated, and 15/15 automated tests passed.</a:t>
             </a:r>
           </a:p>
         </p:txBody>
@@ -7305,7 +7305,7 @@
                 </a:solidFill>
                 <a:latin typeface="Nimbus Sans"/>
               </a:rPr>
-              <a:t>Saved-model inference can run without source data. Full source-to-training reproduction remains blocked by HTTP 403.</a:t>
+              <a:t>Full source-to-training reproduction was completed on 20 September 2026. Results were numerically consistent with the locked reference rather than byte-for-byte identical.</a:t>
             </a:r>
           </a:p>
         </p:txBody>
